--- a/Examples/GroupDocs.Assembly.Examples.Java/Data/Output/Presentation Reports/Multiple DS_report.pptx
+++ b/Examples/GroupDocs.Assembly.Examples.Java/Data/Output/Presentation Reports/Multiple DS_report.pptx
@@ -1,6 +1,6 @@
 
 <file path=ppt/presentation.xml><?xml version="1.0" encoding="utf-8"?>
-<!--Generated by Aspose.Slides for Java 16.5.0.0-->
+<!--Generated by Aspose.Slides for Java 26.2-->
 <p:presentation xmlns:r="http://schemas.openxmlformats.org/officeDocument/2006/relationships" xmlns:a="http://schemas.openxmlformats.org/drawingml/2006/main" xmlns:p="http://schemas.openxmlformats.org/presentationml/2006/main" saveSubsetFonts="1">
   <p:sldMasterIdLst>
     <p:sldMasterId id="2147483648" r:id="rId1"/>
@@ -108,16 +108,12 @@
       </a:defRPr>
     </a:lvl9pPr>
   </p:defaultTextStyle>
-  <p:extLst>
-    <p:ext uri="{EFAFB233-063F-42B5-8137-9DF3F51BA10A}">
-      <p15:sldGuideLst xmlns:p15="http://schemas.microsoft.com/office/powerpoint/2012/main"/>
-    </p:ext>
-  </p:extLst>
+  <p:extLst/>
 </p:presentation>
 </file>
 
 <file path=ppt/slideLayouts/slideLayout1.xml><?xml version="1.0" encoding="utf-8"?>
-<p:sldLayout xmlns:a="http://schemas.openxmlformats.org/drawingml/2006/main" xmlns:r="http://schemas.openxmlformats.org/officeDocument/2006/relationships" xmlns:p14="http://schemas.microsoft.com/office/powerpoint/2010/main" xmlns:p15="http://schemas.microsoft.com/office/powerpoint/2012/main" xmlns:p="http://schemas.openxmlformats.org/presentationml/2006/main" type="title" preserve="1">
+<p:sldLayout xmlns:a="http://schemas.openxmlformats.org/drawingml/2006/main" xmlns:r="http://schemas.openxmlformats.org/officeDocument/2006/relationships" xmlns:m="http://schemas.openxmlformats.org/officeDocument/2006/math" xmlns:w="http://schemas.openxmlformats.org/wordprocessingml/2006/main" xmlns:wp="http://schemas.openxmlformats.org/drawingml/2006/wordprocessingDrawing" xmlns:a14="http://schemas.microsoft.com/office/drawing/2010/main" xmlns:mc="http://schemas.openxmlformats.org/markup-compatibility/2006" xmlns:p14="http://schemas.microsoft.com/office/powerpoint/2010/main" xmlns:p15="http://schemas.microsoft.com/office/powerpoint/2012/main" xmlns:p159="http://schemas.microsoft.com/office/powerpoint/2015/09/main" xmlns:p="http://schemas.openxmlformats.org/presentationml/2006/main" type="title" preserve="1">
   <p:cSld name="Title Slide">
     <p:spTree>
       <p:nvGrpSpPr>
@@ -296,7 +292,7 @@
     </p:spTree>
     <p:extLst>
       <p:ext uri="{BB962C8B-B14F-4D97-AF65-F5344CB8AC3E}">
-        <p14:creationId xmlns:p14="http://schemas.microsoft.com/office/powerpoint/2010/main" val="3681858298"/>
+        <p14:creationId val="3681858298"/>
       </p:ext>
     </p:extLst>
   </p:cSld>
@@ -309,7 +305,7 @@
 </file>
 
 <file path=ppt/slideLayouts/slideLayout10.xml><?xml version="1.0" encoding="utf-8"?>
-<p:sldLayout xmlns:a="http://schemas.openxmlformats.org/drawingml/2006/main" xmlns:r="http://schemas.openxmlformats.org/officeDocument/2006/relationships" xmlns:p14="http://schemas.microsoft.com/office/powerpoint/2010/main" xmlns:p15="http://schemas.microsoft.com/office/powerpoint/2012/main" xmlns:p="http://schemas.openxmlformats.org/presentationml/2006/main" type="vertTx" preserve="1">
+<p:sldLayout xmlns:a="http://schemas.openxmlformats.org/drawingml/2006/main" xmlns:r="http://schemas.openxmlformats.org/officeDocument/2006/relationships" xmlns:m="http://schemas.openxmlformats.org/officeDocument/2006/math" xmlns:w="http://schemas.openxmlformats.org/wordprocessingml/2006/main" xmlns:wp="http://schemas.openxmlformats.org/drawingml/2006/wordprocessingDrawing" xmlns:a14="http://schemas.microsoft.com/office/drawing/2010/main" xmlns:mc="http://schemas.openxmlformats.org/markup-compatibility/2006" xmlns:p14="http://schemas.microsoft.com/office/powerpoint/2010/main" xmlns:p15="http://schemas.microsoft.com/office/powerpoint/2012/main" xmlns:p159="http://schemas.microsoft.com/office/powerpoint/2015/09/main" xmlns:p="http://schemas.openxmlformats.org/presentationml/2006/main" type="vertTx" preserve="1">
   <p:cSld name="Title and Vertical Text">
     <p:spTree>
       <p:nvGrpSpPr>
@@ -466,7 +462,7 @@
     </p:spTree>
     <p:extLst>
       <p:ext uri="{BB962C8B-B14F-4D97-AF65-F5344CB8AC3E}">
-        <p14:creationId xmlns:p14="http://schemas.microsoft.com/office/powerpoint/2010/main" val="1369611824"/>
+        <p14:creationId val="1369611824"/>
       </p:ext>
     </p:extLst>
   </p:cSld>
@@ -479,7 +475,7 @@
 </file>
 
 <file path=ppt/slideLayouts/slideLayout11.xml><?xml version="1.0" encoding="utf-8"?>
-<p:sldLayout xmlns:a="http://schemas.openxmlformats.org/drawingml/2006/main" xmlns:r="http://schemas.openxmlformats.org/officeDocument/2006/relationships" xmlns:p14="http://schemas.microsoft.com/office/powerpoint/2010/main" xmlns:p15="http://schemas.microsoft.com/office/powerpoint/2012/main" xmlns:p="http://schemas.openxmlformats.org/presentationml/2006/main" type="vertTitleAndTx" preserve="1">
+<p:sldLayout xmlns:a="http://schemas.openxmlformats.org/drawingml/2006/main" xmlns:r="http://schemas.openxmlformats.org/officeDocument/2006/relationships" xmlns:m="http://schemas.openxmlformats.org/officeDocument/2006/math" xmlns:w="http://schemas.openxmlformats.org/wordprocessingml/2006/main" xmlns:wp="http://schemas.openxmlformats.org/drawingml/2006/wordprocessingDrawing" xmlns:a14="http://schemas.microsoft.com/office/drawing/2010/main" xmlns:mc="http://schemas.openxmlformats.org/markup-compatibility/2006" xmlns:p14="http://schemas.microsoft.com/office/powerpoint/2010/main" xmlns:p15="http://schemas.microsoft.com/office/powerpoint/2012/main" xmlns:p159="http://schemas.microsoft.com/office/powerpoint/2015/09/main" xmlns:p="http://schemas.openxmlformats.org/presentationml/2006/main" type="vertTitleAndTx" preserve="1">
   <p:cSld name="Vertical Title and Text">
     <p:spTree>
       <p:nvGrpSpPr>
@@ -646,7 +642,7 @@
     </p:spTree>
     <p:extLst>
       <p:ext uri="{BB962C8B-B14F-4D97-AF65-F5344CB8AC3E}">
-        <p14:creationId xmlns:p14="http://schemas.microsoft.com/office/powerpoint/2010/main" val="93353238"/>
+        <p14:creationId val="93353238"/>
       </p:ext>
     </p:extLst>
   </p:cSld>
@@ -659,7 +655,7 @@
 </file>
 
 <file path=ppt/slideLayouts/slideLayout2.xml><?xml version="1.0" encoding="utf-8"?>
-<p:sldLayout xmlns:a="http://schemas.openxmlformats.org/drawingml/2006/main" xmlns:r="http://schemas.openxmlformats.org/officeDocument/2006/relationships" xmlns:p14="http://schemas.microsoft.com/office/powerpoint/2010/main" xmlns:p15="http://schemas.microsoft.com/office/powerpoint/2012/main" xmlns:p="http://schemas.openxmlformats.org/presentationml/2006/main" type="obj" preserve="1">
+<p:sldLayout xmlns:a="http://schemas.openxmlformats.org/drawingml/2006/main" xmlns:r="http://schemas.openxmlformats.org/officeDocument/2006/relationships" xmlns:m="http://schemas.openxmlformats.org/officeDocument/2006/math" xmlns:w="http://schemas.openxmlformats.org/wordprocessingml/2006/main" xmlns:wp="http://schemas.openxmlformats.org/drawingml/2006/wordprocessingDrawing" xmlns:a14="http://schemas.microsoft.com/office/drawing/2010/main" xmlns:mc="http://schemas.openxmlformats.org/markup-compatibility/2006" xmlns:p14="http://schemas.microsoft.com/office/powerpoint/2010/main" xmlns:p15="http://schemas.microsoft.com/office/powerpoint/2012/main" xmlns:p159="http://schemas.microsoft.com/office/powerpoint/2015/09/main" xmlns:p="http://schemas.openxmlformats.org/presentationml/2006/main" type="obj" preserve="1">
   <p:cSld name="Title and Content">
     <p:spTree>
       <p:nvGrpSpPr>
@@ -816,7 +812,7 @@
     </p:spTree>
     <p:extLst>
       <p:ext uri="{BB962C8B-B14F-4D97-AF65-F5344CB8AC3E}">
-        <p14:creationId xmlns:p14="http://schemas.microsoft.com/office/powerpoint/2010/main" val="3536050034"/>
+        <p14:creationId val="3536050034"/>
       </p:ext>
     </p:extLst>
   </p:cSld>
@@ -829,7 +825,7 @@
 </file>
 
 <file path=ppt/slideLayouts/slideLayout3.xml><?xml version="1.0" encoding="utf-8"?>
-<p:sldLayout xmlns:a="http://schemas.openxmlformats.org/drawingml/2006/main" xmlns:r="http://schemas.openxmlformats.org/officeDocument/2006/relationships" xmlns:p14="http://schemas.microsoft.com/office/powerpoint/2010/main" xmlns:p15="http://schemas.microsoft.com/office/powerpoint/2012/main" xmlns:p="http://schemas.openxmlformats.org/presentationml/2006/main" type="secHead" preserve="1">
+<p:sldLayout xmlns:a="http://schemas.openxmlformats.org/drawingml/2006/main" xmlns:r="http://schemas.openxmlformats.org/officeDocument/2006/relationships" xmlns:m="http://schemas.openxmlformats.org/officeDocument/2006/math" xmlns:w="http://schemas.openxmlformats.org/wordprocessingml/2006/main" xmlns:wp="http://schemas.openxmlformats.org/drawingml/2006/wordprocessingDrawing" xmlns:a14="http://schemas.microsoft.com/office/drawing/2010/main" xmlns:mc="http://schemas.openxmlformats.org/markup-compatibility/2006" xmlns:p14="http://schemas.microsoft.com/office/powerpoint/2010/main" xmlns:p15="http://schemas.microsoft.com/office/powerpoint/2012/main" xmlns:p159="http://schemas.microsoft.com/office/powerpoint/2015/09/main" xmlns:p="http://schemas.openxmlformats.org/presentationml/2006/main" type="secHead" preserve="1">
   <p:cSld name="Section Header">
     <p:spTree>
       <p:nvGrpSpPr>
@@ -1062,7 +1058,7 @@
     </p:spTree>
     <p:extLst>
       <p:ext uri="{BB962C8B-B14F-4D97-AF65-F5344CB8AC3E}">
-        <p14:creationId xmlns:p14="http://schemas.microsoft.com/office/powerpoint/2010/main" val="1473755076"/>
+        <p14:creationId val="1473755076"/>
       </p:ext>
     </p:extLst>
   </p:cSld>
@@ -1075,7 +1071,7 @@
 </file>
 
 <file path=ppt/slideLayouts/slideLayout4.xml><?xml version="1.0" encoding="utf-8"?>
-<p:sldLayout xmlns:a="http://schemas.openxmlformats.org/drawingml/2006/main" xmlns:r="http://schemas.openxmlformats.org/officeDocument/2006/relationships" xmlns:p14="http://schemas.microsoft.com/office/powerpoint/2010/main" xmlns:p15="http://schemas.microsoft.com/office/powerpoint/2012/main" xmlns:p="http://schemas.openxmlformats.org/presentationml/2006/main" type="twoObj" preserve="1">
+<p:sldLayout xmlns:a="http://schemas.openxmlformats.org/drawingml/2006/main" xmlns:r="http://schemas.openxmlformats.org/officeDocument/2006/relationships" xmlns:m="http://schemas.openxmlformats.org/officeDocument/2006/math" xmlns:w="http://schemas.openxmlformats.org/wordprocessingml/2006/main" xmlns:wp="http://schemas.openxmlformats.org/drawingml/2006/wordprocessingDrawing" xmlns:a14="http://schemas.microsoft.com/office/drawing/2010/main" xmlns:mc="http://schemas.openxmlformats.org/markup-compatibility/2006" xmlns:p14="http://schemas.microsoft.com/office/powerpoint/2010/main" xmlns:p15="http://schemas.microsoft.com/office/powerpoint/2012/main" xmlns:p159="http://schemas.microsoft.com/office/powerpoint/2015/09/main" xmlns:p="http://schemas.openxmlformats.org/presentationml/2006/main" type="twoObj" preserve="1">
   <p:cSld name="Two Content">
     <p:spTree>
       <p:nvGrpSpPr>
@@ -1294,7 +1290,7 @@
     </p:spTree>
     <p:extLst>
       <p:ext uri="{BB962C8B-B14F-4D97-AF65-F5344CB8AC3E}">
-        <p14:creationId xmlns:p14="http://schemas.microsoft.com/office/powerpoint/2010/main" val="1678343448"/>
+        <p14:creationId val="1678343448"/>
       </p:ext>
     </p:extLst>
   </p:cSld>
@@ -1307,7 +1303,7 @@
 </file>
 
 <file path=ppt/slideLayouts/slideLayout5.xml><?xml version="1.0" encoding="utf-8"?>
-<p:sldLayout xmlns:a="http://schemas.openxmlformats.org/drawingml/2006/main" xmlns:r="http://schemas.openxmlformats.org/officeDocument/2006/relationships" xmlns:p14="http://schemas.microsoft.com/office/powerpoint/2010/main" xmlns:p15="http://schemas.microsoft.com/office/powerpoint/2012/main" xmlns:p="http://schemas.openxmlformats.org/presentationml/2006/main" type="twoTxTwoObj" preserve="1">
+<p:sldLayout xmlns:a="http://schemas.openxmlformats.org/drawingml/2006/main" xmlns:r="http://schemas.openxmlformats.org/officeDocument/2006/relationships" xmlns:m="http://schemas.openxmlformats.org/officeDocument/2006/math" xmlns:w="http://schemas.openxmlformats.org/wordprocessingml/2006/main" xmlns:wp="http://schemas.openxmlformats.org/drawingml/2006/wordprocessingDrawing" xmlns:a14="http://schemas.microsoft.com/office/drawing/2010/main" xmlns:mc="http://schemas.openxmlformats.org/markup-compatibility/2006" xmlns:p14="http://schemas.microsoft.com/office/powerpoint/2010/main" xmlns:p15="http://schemas.microsoft.com/office/powerpoint/2012/main" xmlns:p159="http://schemas.microsoft.com/office/powerpoint/2015/09/main" xmlns:p="http://schemas.openxmlformats.org/presentationml/2006/main" type="twoTxTwoObj" preserve="1">
   <p:cSld name="Comparison">
     <p:spTree>
       <p:nvGrpSpPr>
@@ -1661,7 +1657,7 @@
     </p:spTree>
     <p:extLst>
       <p:ext uri="{BB962C8B-B14F-4D97-AF65-F5344CB8AC3E}">
-        <p14:creationId xmlns:p14="http://schemas.microsoft.com/office/powerpoint/2010/main" val="2745148225"/>
+        <p14:creationId val="2745148225"/>
       </p:ext>
     </p:extLst>
   </p:cSld>
@@ -1674,7 +1670,7 @@
 </file>
 
 <file path=ppt/slideLayouts/slideLayout6.xml><?xml version="1.0" encoding="utf-8"?>
-<p:sldLayout xmlns:a="http://schemas.openxmlformats.org/drawingml/2006/main" xmlns:r="http://schemas.openxmlformats.org/officeDocument/2006/relationships" xmlns:p14="http://schemas.microsoft.com/office/powerpoint/2010/main" xmlns:p15="http://schemas.microsoft.com/office/powerpoint/2012/main" xmlns:p="http://schemas.openxmlformats.org/presentationml/2006/main" type="titleOnly" preserve="1">
+<p:sldLayout xmlns:a="http://schemas.openxmlformats.org/drawingml/2006/main" xmlns:r="http://schemas.openxmlformats.org/officeDocument/2006/relationships" xmlns:m="http://schemas.openxmlformats.org/officeDocument/2006/math" xmlns:w="http://schemas.openxmlformats.org/wordprocessingml/2006/main" xmlns:wp="http://schemas.openxmlformats.org/drawingml/2006/wordprocessingDrawing" xmlns:a14="http://schemas.microsoft.com/office/drawing/2010/main" xmlns:mc="http://schemas.openxmlformats.org/markup-compatibility/2006" xmlns:p14="http://schemas.microsoft.com/office/powerpoint/2010/main" xmlns:p15="http://schemas.microsoft.com/office/powerpoint/2012/main" xmlns:p159="http://schemas.microsoft.com/office/powerpoint/2015/09/main" xmlns:p="http://schemas.openxmlformats.org/presentationml/2006/main" type="titleOnly" preserve="1">
   <p:cSld name="Title Only">
     <p:spTree>
       <p:nvGrpSpPr>
@@ -1779,7 +1775,7 @@
     </p:spTree>
     <p:extLst>
       <p:ext uri="{BB962C8B-B14F-4D97-AF65-F5344CB8AC3E}">
-        <p14:creationId xmlns:p14="http://schemas.microsoft.com/office/powerpoint/2010/main" val="1870296272"/>
+        <p14:creationId val="1870296272"/>
       </p:ext>
     </p:extLst>
   </p:cSld>
@@ -1792,7 +1788,7 @@
 </file>
 
 <file path=ppt/slideLayouts/slideLayout7.xml><?xml version="1.0" encoding="utf-8"?>
-<p:sldLayout xmlns:a="http://schemas.openxmlformats.org/drawingml/2006/main" xmlns:r="http://schemas.openxmlformats.org/officeDocument/2006/relationships" xmlns:p14="http://schemas.microsoft.com/office/powerpoint/2010/main" xmlns:p15="http://schemas.microsoft.com/office/powerpoint/2012/main" xmlns:p="http://schemas.openxmlformats.org/presentationml/2006/main" type="blank" preserve="1">
+<p:sldLayout xmlns:a="http://schemas.openxmlformats.org/drawingml/2006/main" xmlns:r="http://schemas.openxmlformats.org/officeDocument/2006/relationships" xmlns:m="http://schemas.openxmlformats.org/officeDocument/2006/math" xmlns:w="http://schemas.openxmlformats.org/wordprocessingml/2006/main" xmlns:wp="http://schemas.openxmlformats.org/drawingml/2006/wordprocessingDrawing" xmlns:a14="http://schemas.microsoft.com/office/drawing/2010/main" xmlns:mc="http://schemas.openxmlformats.org/markup-compatibility/2006" xmlns:p14="http://schemas.microsoft.com/office/powerpoint/2010/main" xmlns:p15="http://schemas.microsoft.com/office/powerpoint/2012/main" xmlns:p159="http://schemas.microsoft.com/office/powerpoint/2015/09/main" xmlns:p="http://schemas.openxmlformats.org/presentationml/2006/main" type="blank" preserve="1">
   <p:cSld name="Blank">
     <p:spTree>
       <p:nvGrpSpPr>
@@ -1874,7 +1870,7 @@
     </p:spTree>
     <p:extLst>
       <p:ext uri="{BB962C8B-B14F-4D97-AF65-F5344CB8AC3E}">
-        <p14:creationId xmlns:p14="http://schemas.microsoft.com/office/powerpoint/2010/main" val="1585900572"/>
+        <p14:creationId val="1585900572"/>
       </p:ext>
     </p:extLst>
   </p:cSld>
@@ -1887,7 +1883,7 @@
 </file>
 
 <file path=ppt/slideLayouts/slideLayout8.xml><?xml version="1.0" encoding="utf-8"?>
-<p:sldLayout xmlns:a="http://schemas.openxmlformats.org/drawingml/2006/main" xmlns:r="http://schemas.openxmlformats.org/officeDocument/2006/relationships" xmlns:p14="http://schemas.microsoft.com/office/powerpoint/2010/main" xmlns:p15="http://schemas.microsoft.com/office/powerpoint/2012/main" xmlns:p="http://schemas.openxmlformats.org/presentationml/2006/main" type="objTx" preserve="1">
+<p:sldLayout xmlns:a="http://schemas.openxmlformats.org/drawingml/2006/main" xmlns:r="http://schemas.openxmlformats.org/officeDocument/2006/relationships" xmlns:m="http://schemas.openxmlformats.org/officeDocument/2006/math" xmlns:w="http://schemas.openxmlformats.org/wordprocessingml/2006/main" xmlns:wp="http://schemas.openxmlformats.org/drawingml/2006/wordprocessingDrawing" xmlns:a14="http://schemas.microsoft.com/office/drawing/2010/main" xmlns:mc="http://schemas.openxmlformats.org/markup-compatibility/2006" xmlns:p14="http://schemas.microsoft.com/office/powerpoint/2010/main" xmlns:p15="http://schemas.microsoft.com/office/powerpoint/2012/main" xmlns:p159="http://schemas.microsoft.com/office/powerpoint/2015/09/main" xmlns:p="http://schemas.openxmlformats.org/presentationml/2006/main" type="objTx" preserve="1">
   <p:cSld name="Content with Caption">
     <p:spTree>
       <p:nvGrpSpPr>
@@ -2151,7 +2147,7 @@
     </p:spTree>
     <p:extLst>
       <p:ext uri="{BB962C8B-B14F-4D97-AF65-F5344CB8AC3E}">
-        <p14:creationId xmlns:p14="http://schemas.microsoft.com/office/powerpoint/2010/main" val="1572959247"/>
+        <p14:creationId val="1572959247"/>
       </p:ext>
     </p:extLst>
   </p:cSld>
@@ -2164,7 +2160,7 @@
 </file>
 
 <file path=ppt/slideLayouts/slideLayout9.xml><?xml version="1.0" encoding="utf-8"?>
-<p:sldLayout xmlns:a="http://schemas.openxmlformats.org/drawingml/2006/main" xmlns:r="http://schemas.openxmlformats.org/officeDocument/2006/relationships" xmlns:p14="http://schemas.microsoft.com/office/powerpoint/2010/main" xmlns:p15="http://schemas.microsoft.com/office/powerpoint/2012/main" xmlns:p="http://schemas.openxmlformats.org/presentationml/2006/main" type="picTx" preserve="1">
+<p:sldLayout xmlns:a="http://schemas.openxmlformats.org/drawingml/2006/main" xmlns:r="http://schemas.openxmlformats.org/officeDocument/2006/relationships" xmlns:m="http://schemas.openxmlformats.org/officeDocument/2006/math" xmlns:w="http://schemas.openxmlformats.org/wordprocessingml/2006/main" xmlns:wp="http://schemas.openxmlformats.org/drawingml/2006/wordprocessingDrawing" xmlns:a14="http://schemas.microsoft.com/office/drawing/2010/main" xmlns:mc="http://schemas.openxmlformats.org/markup-compatibility/2006" xmlns:p14="http://schemas.microsoft.com/office/powerpoint/2010/main" xmlns:p15="http://schemas.microsoft.com/office/powerpoint/2012/main" xmlns:p159="http://schemas.microsoft.com/office/powerpoint/2015/09/main" xmlns:p="http://schemas.openxmlformats.org/presentationml/2006/main" type="picTx" preserve="1">
   <p:cSld name="Picture with Caption">
     <p:spTree>
       <p:nvGrpSpPr>
@@ -2404,7 +2400,7 @@
     </p:spTree>
     <p:extLst>
       <p:ext uri="{BB962C8B-B14F-4D97-AF65-F5344CB8AC3E}">
-        <p14:creationId xmlns:p14="http://schemas.microsoft.com/office/powerpoint/2010/main" val="746809067"/>
+        <p14:creationId val="746809067"/>
       </p:ext>
     </p:extLst>
   </p:cSld>
@@ -2417,7 +2413,7 @@
 </file>
 
 <file path=ppt/slideMasters/slideMaster1.xml><?xml version="1.0" encoding="utf-8"?>
-<p:sldMaster xmlns:a="http://schemas.openxmlformats.org/drawingml/2006/main" xmlns:r="http://schemas.openxmlformats.org/officeDocument/2006/relationships" xmlns:p14="http://schemas.microsoft.com/office/powerpoint/2010/main" xmlns:p15="http://schemas.microsoft.com/office/powerpoint/2012/main" xmlns:p="http://schemas.openxmlformats.org/presentationml/2006/main">
+<p:sldMaster xmlns:a="http://schemas.openxmlformats.org/drawingml/2006/main" xmlns:r="http://schemas.openxmlformats.org/officeDocument/2006/relationships" xmlns:m="http://schemas.openxmlformats.org/officeDocument/2006/math" xmlns:w="http://schemas.openxmlformats.org/wordprocessingml/2006/main" xmlns:wp="http://schemas.openxmlformats.org/drawingml/2006/wordprocessingDrawing" xmlns:a14="http://schemas.microsoft.com/office/drawing/2010/main" xmlns:mc="http://schemas.openxmlformats.org/markup-compatibility/2006" xmlns:p14="http://schemas.microsoft.com/office/powerpoint/2010/main" xmlns:p15="http://schemas.microsoft.com/office/powerpoint/2012/main" xmlns:p159="http://schemas.microsoft.com/office/powerpoint/2015/09/main" xmlns:p="http://schemas.openxmlformats.org/presentationml/2006/main">
   <p:cSld>
     <p:bg>
       <p:bgRef idx="1001">
@@ -2653,7 +2649,7 @@
     </p:spTree>
     <p:extLst>
       <p:ext uri="{BB962C8B-B14F-4D97-AF65-F5344CB8AC3E}">
-        <p14:creationId xmlns:p14="http://schemas.microsoft.com/office/powerpoint/2010/main" val="2945104824"/>
+        <p14:creationId val="2945104824"/>
       </p:ext>
     </p:extLst>
   </p:cSld>
@@ -2957,8 +2953,8 @@
 </file>
 
 <file path=ppt/slides/slide1.xml><?xml version="1.0" encoding="utf-8"?>
-<p:sld xmlns:a="http://schemas.openxmlformats.org/drawingml/2006/main" xmlns:r="http://schemas.openxmlformats.org/officeDocument/2006/relationships" xmlns:p14="http://schemas.microsoft.com/office/powerpoint/2010/main" xmlns:p15="http://schemas.microsoft.com/office/powerpoint/2012/main" xmlns:p="http://schemas.openxmlformats.org/presentationml/2006/main">
-  <p:cSld>
+<p:sld xmlns:a="http://schemas.openxmlformats.org/drawingml/2006/main" xmlns:r="http://schemas.openxmlformats.org/officeDocument/2006/relationships" xmlns:m="http://schemas.openxmlformats.org/officeDocument/2006/math" xmlns:w="http://schemas.openxmlformats.org/wordprocessingml/2006/main" xmlns:wp="http://schemas.openxmlformats.org/drawingml/2006/wordprocessingDrawing" xmlns:a14="http://schemas.microsoft.com/office/drawing/2010/main" xmlns:mc="http://schemas.openxmlformats.org/markup-compatibility/2006" xmlns:p14="http://schemas.microsoft.com/office/powerpoint/2010/main" xmlns:p15="http://schemas.microsoft.com/office/powerpoint/2012/main" xmlns:p159="http://schemas.microsoft.com/office/powerpoint/2015/09/main" xmlns:p="http://schemas.openxmlformats.org/presentationml/2006/main">
+  <p:cSld name="">
     <p:spTree>
       <p:nvGrpSpPr>
         <p:cNvPr id="1" name=""/>
@@ -3002,7 +2998,9 @@
         </p:nvSpPr>
         <p:spPr/>
         <p:txBody>
-          <a:bodyPr/>
+          <a:bodyPr>
+            <a:normAutofit fontScale="97500" lnSpcReduction="20000"/>
+          </a:bodyPr>
           <a:lstStyle/>
           <a:p>
             <a:pPr marL="0" indent="0">
@@ -3115,14 +3113,14 @@
           <p:nvPr>
             <p:extLst>
               <p:ext uri="{D42A27DB-BD31-4B8C-83A1-F6EECF244321}">
-                <p14:modId xmlns:p14="http://schemas.microsoft.com/office/powerpoint/2010/main" val="2136218467"/>
+                <p14:modId val="2136218467"/>
               </p:ext>
             </p:extLst>
           </p:nvPr>
         </p:nvGraphicFramePr>
         <p:xfrm>
           <a:off x="3128963" y="4109554"/>
-          <a:ext cx="5934075" cy="717499"/>
+          <a:ext cx="5934075" cy="684787"/>
         </p:xfrm>
         <a:graphic>
           <a:graphicData uri="http://schemas.openxmlformats.org/drawingml/2006/table">
@@ -3137,7 +3135,7 @@
               <a:tr h="0">
                 <a:tc>
                   <a:txBody>
-                    <a:bodyPr/>
+                    <a:bodyPr vert="horz" wrap="square"/>
                     <a:lstStyle/>
                     <a:p>
                       <a:pPr marL="0" marR="0">
@@ -3169,7 +3167,7 @@
                 </a:tc>
                 <a:tc>
                   <a:txBody>
-                    <a:bodyPr/>
+                    <a:bodyPr vert="horz" wrap="square"/>
                     <a:lstStyle/>
                     <a:p>
                       <a:pPr marL="0" marR="0">
@@ -3203,7 +3201,7 @@
               <a:tr h="0">
                 <a:tc>
                   <a:txBody>
-                    <a:bodyPr/>
+                    <a:bodyPr vert="horz" wrap="square"/>
                     <a:lstStyle/>
                     <a:p>
                       <a:pPr marL="0" marR="0">
@@ -3235,7 +3233,7 @@
                 </a:tc>
                 <a:tc>
                   <a:txBody>
-                    <a:bodyPr/>
+                    <a:bodyPr vert="horz" wrap="square"/>
                     <a:lstStyle/>
                     <a:p>
                       <a:pPr marL="0" marR="0">
@@ -3269,7 +3267,7 @@
               <a:tr h="0">
                 <a:tc>
                   <a:txBody>
-                    <a:bodyPr/>
+                    <a:bodyPr vert="horz" wrap="square"/>
                     <a:lstStyle/>
                     <a:p>
                       <a:pPr marL="0" marR="0">
@@ -3301,7 +3299,7 @@
                 </a:tc>
                 <a:tc>
                   <a:txBody>
-                    <a:bodyPr/>
+                    <a:bodyPr vert="horz" wrap="square"/>
                     <a:lstStyle/>
                     <a:p>
                       <a:pPr marL="0" marR="0">
@@ -3335,7 +3333,7 @@
               <a:tr h="0">
                 <a:tc>
                   <a:txBody>
-                    <a:bodyPr/>
+                    <a:bodyPr vert="horz" wrap="square"/>
                     <a:lstStyle/>
                     <a:p>
                       <a:pPr marL="0" marR="0">
@@ -3367,7 +3365,7 @@
                 </a:tc>
                 <a:tc>
                   <a:txBody>
-                    <a:bodyPr/>
+                    <a:bodyPr vert="horz" wrap="square"/>
                     <a:lstStyle/>
                     <a:p>
                       <a:pPr marL="0" marR="0">
@@ -3536,7 +3534,7 @@
     </p:spTree>
     <p:extLst>
       <p:ext uri="{BB962C8B-B14F-4D97-AF65-F5344CB8AC3E}">
-        <p14:creationId xmlns:p14="http://schemas.microsoft.com/office/powerpoint/2010/main" val="70775685"/>
+        <p14:creationId val="70775685"/>
       </p:ext>
     </p:extLst>
   </p:cSld>
@@ -3550,10 +3548,10 @@
 
 <file path=ppt/tags/tag1.xml><?xml version="1.0" encoding="utf-8"?>
 <p:tagLst xmlns:p="http://schemas.openxmlformats.org/presentationml/2006/main">
-  <p:tag name="AS_OS" val="Microsoft Windows NT 6.3"/>
-  <p:tag name="AS_RELEASE_DATE" val="2016.06.11"/>
+  <p:tag name="AS_OS" val="Microsoft Windows NT 10.0"/>
+  <p:tag name="AS_RELEASE_DATE" val="2026.02.28"/>
   <p:tag name="AS_TITLE" val="Aspose.Slides for Java"/>
-  <p:tag name="AS_VERSION" val="16.5.0.0"/>
+  <p:tag name="AS_VERSION" val="26.2"/>
 </p:tagLst>
 </file>
 
@@ -3565,7 +3563,7 @@
         <a:sysClr val="windowText" lastClr="000000"/>
       </a:dk1>
       <a:lt1>
-        <a:sysClr val="window" lastClr="FFFEFF"/>
+        <a:sysClr val="window" lastClr="FFFFFF"/>
       </a:lt1>
       <a:dk2>
         <a:srgbClr val="44546A"/>
@@ -3601,7 +3599,7 @@
     <a:fontScheme name="Office">
       <a:majorFont>
         <a:latin typeface="Calibri Light" panose="020f0302020204030204"/>
-        <a:ea typeface="Arial"/>
+        <a:ea typeface="Calibri Light" panose="020f0302020204030204"/>
         <a:cs typeface="Arial"/>
         <a:font script="Jpan" typeface="ＭＳ Ｐゴシック"/>
         <a:font script="Hang" typeface="맑은 고딕"/>
@@ -3636,7 +3634,7 @@
       </a:majorFont>
       <a:minorFont>
         <a:latin typeface="Calibri" panose="020f0502020204030204"/>
-        <a:ea typeface="Arial"/>
+        <a:ea typeface="Calibri" panose="020f0502020204030204"/>
         <a:cs typeface="Arial"/>
         <a:font script="Jpan" typeface="ＭＳ Ｐゴシック"/>
         <a:font script="Hang" typeface="맑은 고딕"/>
@@ -3700,7 +3698,6 @@
             </a:gs>
           </a:gsLst>
           <a:lin ang="5400000" scaled="0"/>
-          <a:tileRect/>
         </a:gradFill>
         <a:gradFill rotWithShape="1">
           <a:gsLst>
@@ -3727,7 +3724,6 @@
             </a:gs>
           </a:gsLst>
           <a:lin ang="5400000" scaled="0"/>
-          <a:tileRect/>
         </a:gradFill>
       </a:fillStyleLst>
       <a:lnStyleLst>
@@ -3806,7 +3802,6 @@
             </a:gs>
           </a:gsLst>
           <a:lin ang="5400000" scaled="0"/>
-          <a:tileRect/>
         </a:gradFill>
       </a:bgFillStyleLst>
     </a:fmtScheme>
